--- a/plots_files/plots_png/pptx/plots_png_pdf.pptx
+++ b/plots_files/plots_png/pptx/plots_png_pdf.pptx
@@ -1,6 +1,6 @@
 
 <file path=ppt/presentation.xml><?xml version="1.0" encoding="utf-8"?>
-<p:presentation xmlns:a="http://schemas.openxmlformats.org/drawingml/2006/main" xmlns:r="http://schemas.openxmlformats.org/officeDocument/2006/relationships" xmlns:p="http://schemas.openxmlformats.org/presentationml/2006/main" saveSubsetFonts="1">
+<p:presentation xmlns:a="http://schemas.openxmlformats.org/drawingml/2006/main" xmlns:r="http://schemas.openxmlformats.org/officeDocument/2006/relationships" xmlns:p="http://schemas.openxmlformats.org/presentationml/2006/main" saveSubsetFonts="1" autoCompressPictures="0">
   <p:sldMasterIdLst>
     <p:sldMasterId id="2147483696" r:id="rId1"/>
   </p:sldMasterIdLst>
@@ -254,7 +254,7 @@
           <a:p>
             <a:fld id="{83D14EEA-DE26-4810-8E05-A65F0010FADE}" type="datetimeFigureOut">
               <a:rPr lang="de-DE" smtClean="0"/>
-              <a:t>25.03.2026</a:t>
+              <a:t>02.09.2026</a:t>
             </a:fld>
             <a:endParaRPr lang="de-DE"/>
           </a:p>
@@ -424,7 +424,7 @@
           <a:p>
             <a:fld id="{83D14EEA-DE26-4810-8E05-A65F0010FADE}" type="datetimeFigureOut">
               <a:rPr lang="de-DE" smtClean="0"/>
-              <a:t>25.03.2026</a:t>
+              <a:t>02.09.2026</a:t>
             </a:fld>
             <a:endParaRPr lang="de-DE"/>
           </a:p>
@@ -604,7 +604,7 @@
           <a:p>
             <a:fld id="{83D14EEA-DE26-4810-8E05-A65F0010FADE}" type="datetimeFigureOut">
               <a:rPr lang="de-DE" smtClean="0"/>
-              <a:t>25.03.2026</a:t>
+              <a:t>02.09.2026</a:t>
             </a:fld>
             <a:endParaRPr lang="de-DE"/>
           </a:p>
@@ -774,7 +774,7 @@
           <a:p>
             <a:fld id="{83D14EEA-DE26-4810-8E05-A65F0010FADE}" type="datetimeFigureOut">
               <a:rPr lang="de-DE" smtClean="0"/>
-              <a:t>25.03.2026</a:t>
+              <a:t>02.09.2026</a:t>
             </a:fld>
             <a:endParaRPr lang="de-DE"/>
           </a:p>
@@ -1018,7 +1018,7 @@
           <a:p>
             <a:fld id="{83D14EEA-DE26-4810-8E05-A65F0010FADE}" type="datetimeFigureOut">
               <a:rPr lang="de-DE" smtClean="0"/>
-              <a:t>25.03.2026</a:t>
+              <a:t>02.09.2026</a:t>
             </a:fld>
             <a:endParaRPr lang="de-DE"/>
           </a:p>
@@ -1250,7 +1250,7 @@
           <a:p>
             <a:fld id="{83D14EEA-DE26-4810-8E05-A65F0010FADE}" type="datetimeFigureOut">
               <a:rPr lang="de-DE" smtClean="0"/>
-              <a:t>25.03.2026</a:t>
+              <a:t>02.09.2026</a:t>
             </a:fld>
             <a:endParaRPr lang="de-DE"/>
           </a:p>
@@ -1617,7 +1617,7 @@
           <a:p>
             <a:fld id="{83D14EEA-DE26-4810-8E05-A65F0010FADE}" type="datetimeFigureOut">
               <a:rPr lang="de-DE" smtClean="0"/>
-              <a:t>25.03.2026</a:t>
+              <a:t>02.09.2026</a:t>
             </a:fld>
             <a:endParaRPr lang="de-DE"/>
           </a:p>
@@ -1735,7 +1735,7 @@
           <a:p>
             <a:fld id="{83D14EEA-DE26-4810-8E05-A65F0010FADE}" type="datetimeFigureOut">
               <a:rPr lang="de-DE" smtClean="0"/>
-              <a:t>25.03.2026</a:t>
+              <a:t>02.09.2026</a:t>
             </a:fld>
             <a:endParaRPr lang="de-DE"/>
           </a:p>
@@ -1830,7 +1830,7 @@
           <a:p>
             <a:fld id="{83D14EEA-DE26-4810-8E05-A65F0010FADE}" type="datetimeFigureOut">
               <a:rPr lang="de-DE" smtClean="0"/>
-              <a:t>25.03.2026</a:t>
+              <a:t>02.09.2026</a:t>
             </a:fld>
             <a:endParaRPr lang="de-DE"/>
           </a:p>
@@ -2107,7 +2107,7 @@
           <a:p>
             <a:fld id="{83D14EEA-DE26-4810-8E05-A65F0010FADE}" type="datetimeFigureOut">
               <a:rPr lang="de-DE" smtClean="0"/>
-              <a:t>25.03.2026</a:t>
+              <a:t>02.09.2026</a:t>
             </a:fld>
             <a:endParaRPr lang="de-DE"/>
           </a:p>
@@ -2364,7 +2364,7 @@
           <a:p>
             <a:fld id="{83D14EEA-DE26-4810-8E05-A65F0010FADE}" type="datetimeFigureOut">
               <a:rPr lang="de-DE" smtClean="0"/>
-              <a:t>25.03.2026</a:t>
+              <a:t>02.09.2026</a:t>
             </a:fld>
             <a:endParaRPr lang="de-DE"/>
           </a:p>
@@ -2577,7 +2577,7 @@
           <a:p>
             <a:fld id="{83D14EEA-DE26-4810-8E05-A65F0010FADE}" type="datetimeFigureOut">
               <a:rPr lang="de-DE" smtClean="0"/>
-              <a:t>25.03.2026</a:t>
+              <a:t>02.09.2026</a:t>
             </a:fld>
             <a:endParaRPr lang="de-DE"/>
           </a:p>
@@ -3511,7 +3511,7 @@
                   <a:latin typeface="Arial" panose="020B0604020202020204" pitchFamily="34" charset="0"/>
                   <a:cs typeface="Arial" panose="020B0604020202020204" pitchFamily="34" charset="0"/>
                 </a:rPr>
-                <a:t>of Datasets</a:t>
+                <a:t>to Datasets</a:t>
               </a:r>
             </a:p>
           </p:txBody>
@@ -3979,7 +3979,7 @@
                   <a:latin typeface="Arial" panose="020B0604020202020204" pitchFamily="34" charset="0"/>
                   <a:cs typeface="Arial" panose="020B0604020202020204" pitchFamily="34" charset="0"/>
                 </a:rPr>
-                <a:t>of Datasets</a:t>
+                <a:t>to Datasets</a:t>
               </a:r>
               <a:endParaRPr lang="de-DE" sz="1291" dirty="0">
                 <a:latin typeface="Arial" panose="020B0604020202020204" pitchFamily="34" charset="0"/>
@@ -4073,7 +4073,7 @@
                   <a:latin typeface="Arial" panose="020B0604020202020204" pitchFamily="34" charset="0"/>
                   <a:cs typeface="Arial" panose="020B0604020202020204" pitchFamily="34" charset="0"/>
                 </a:rPr>
-                <a:t>References of Datasets</a:t>
+                <a:t>References to Datasets</a:t>
               </a:r>
             </a:p>
             <a:p>
